--- a/docs/L1-Z-MAX产品发布-v1.0.4.pptx
+++ b/docs/L1-Z-MAX产品发布-v1.0.4.pptx
@@ -5,7 +5,7 @@
     <p:sldMasterId id="2147483648" r:id="rId1"/>
   </p:sldMasterIdLst>
   <p:notesMasterIdLst>
-    <p:notesMasterId r:id="rId11"/>
+    <p:notesMasterId r:id="rId14"/>
   </p:notesMasterIdLst>
   <p:sldIdLst>
     <p:sldId id="256" r:id="rId2"/>
@@ -17,6 +17,9 @@
     <p:sldId id="270" r:id="rId8"/>
     <p:sldId id="263" r:id="rId9"/>
     <p:sldId id="264" r:id="rId10"/>
+    <p:sldId id="271" r:id="rId11"/>
+    <p:sldId id="272" r:id="rId12"/>
+    <p:sldId id="273" r:id="rId13"/>
   </p:sldIdLst>
   <p:sldSz cx="9144000" cy="5143500" type="screen16x9"/>
   <p:notesSz cx="5143500" cy="9144000"/>
@@ -327,6 +330,351 @@
     <p:extLst>
       <p:ext uri="{BB962C8B-B14F-4D97-AF65-F5344CB8AC3E}">
         <p14:creationId xmlns:p14="http://schemas.microsoft.com/office/powerpoint/2010/main" val="1024086991"/>
+      </p:ext>
+    </p:extLst>
+  </p:cSld>
+  <p:clrMapOvr>
+    <a:masterClrMapping/>
+  </p:clrMapOvr>
+</p:notes>
+</file>
+
+<file path=ppt/notesSlides/notesSlide10.xml><?xml version="1.0" encoding="utf-8"?>
+<p:notes xmlns:a="http://schemas.openxmlformats.org/drawingml/2006/main" xmlns:r="http://schemas.openxmlformats.org/officeDocument/2006/relationships" xmlns:p="http://schemas.openxmlformats.org/presentationml/2006/main">
+  <p:cSld>
+    <p:spTree>
+      <p:nvGrpSpPr>
+        <p:cNvPr id="1" name="">
+          <a:extLst>
+            <a:ext uri="{FF2B5EF4-FFF2-40B4-BE49-F238E27FC236}">
+              <a16:creationId xmlns:a16="http://schemas.microsoft.com/office/drawing/2014/main" id="{813C99E2-C477-A00D-7715-8166E551910F}"/>
+            </a:ext>
+          </a:extLst>
+        </p:cNvPr>
+        <p:cNvGrpSpPr/>
+        <p:nvPr/>
+      </p:nvGrpSpPr>
+      <p:grpSpPr>
+        <a:xfrm>
+          <a:off x="0" y="0"/>
+          <a:ext cx="0" cy="0"/>
+          <a:chOff x="0" y="0"/>
+          <a:chExt cx="0" cy="0"/>
+        </a:xfrm>
+      </p:grpSpPr>
+      <p:sp>
+        <p:nvSpPr>
+          <p:cNvPr id="2" name="Slide Image Placeholder 1">
+            <a:extLst>
+              <a:ext uri="{FF2B5EF4-FFF2-40B4-BE49-F238E27FC236}">
+                <a16:creationId xmlns:a16="http://schemas.microsoft.com/office/drawing/2014/main" id="{E909234F-BEE2-E6E1-9DF7-B9BB15D6A64A}"/>
+              </a:ext>
+            </a:extLst>
+          </p:cNvPr>
+          <p:cNvSpPr>
+            <a:spLocks noGrp="1" noRot="1" noChangeAspect="1"/>
+          </p:cNvSpPr>
+          <p:nvPr>
+            <p:ph type="sldImg"/>
+          </p:nvPr>
+        </p:nvSpPr>
+        <p:spPr/>
+        <p:txBody>
+          <a:bodyPr/>
+          <a:lstStyle/>
+          <a:p>
+            <a:endParaRPr lang="zh-CN" altLang="en-US"/>
+          </a:p>
+        </p:txBody>
+      </p:sp>
+      <p:sp>
+        <p:nvSpPr>
+          <p:cNvPr id="3" name="Notes Placeholder 2">
+            <a:extLst>
+              <a:ext uri="{FF2B5EF4-FFF2-40B4-BE49-F238E27FC236}">
+                <a16:creationId xmlns:a16="http://schemas.microsoft.com/office/drawing/2014/main" id="{DD531E40-E0A5-17B9-A524-5CC367999408}"/>
+              </a:ext>
+            </a:extLst>
+          </p:cNvPr>
+          <p:cNvSpPr>
+            <a:spLocks noGrp="1"/>
+          </p:cNvSpPr>
+          <p:nvPr>
+            <p:ph type="body" idx="1"/>
+          </p:nvPr>
+        </p:nvSpPr>
+        <p:spPr/>
+        <p:txBody>
+          <a:bodyPr/>
+          <a:lstStyle/>
+          <a:p>
+            <a:endParaRPr lang="en-US" dirty="0"/>
+          </a:p>
+        </p:txBody>
+      </p:sp>
+      <p:sp>
+        <p:nvSpPr>
+          <p:cNvPr id="4" name="Slide Number Placeholder 3">
+            <a:extLst>
+              <a:ext uri="{FF2B5EF4-FFF2-40B4-BE49-F238E27FC236}">
+                <a16:creationId xmlns:a16="http://schemas.microsoft.com/office/drawing/2014/main" id="{928B5C2C-8315-9E69-8E32-25984A0E827E}"/>
+              </a:ext>
+            </a:extLst>
+          </p:cNvPr>
+          <p:cNvSpPr>
+            <a:spLocks noGrp="1"/>
+          </p:cNvSpPr>
+          <p:nvPr>
+            <p:ph type="sldNum" sz="quarter" idx="10"/>
+          </p:nvPr>
+        </p:nvSpPr>
+        <p:spPr/>
+        <p:txBody>
+          <a:bodyPr/>
+          <a:lstStyle/>
+          <a:p>
+            <a:fld id="{F7021451-1387-4CA6-816F-3879F97B5CBC}" type="slidenum">
+              <a:rPr lang="en-US"/>
+              <a:t>10</a:t>
+            </a:fld>
+            <a:endParaRPr lang="en-US"/>
+          </a:p>
+        </p:txBody>
+      </p:sp>
+    </p:spTree>
+    <p:extLst>
+      <p:ext uri="{BB962C8B-B14F-4D97-AF65-F5344CB8AC3E}">
+        <p14:creationId xmlns:p14="http://schemas.microsoft.com/office/powerpoint/2010/main" val="3196008198"/>
+      </p:ext>
+    </p:extLst>
+  </p:cSld>
+  <p:clrMapOvr>
+    <a:masterClrMapping/>
+  </p:clrMapOvr>
+</p:notes>
+</file>
+
+<file path=ppt/notesSlides/notesSlide11.xml><?xml version="1.0" encoding="utf-8"?>
+<p:notes xmlns:a="http://schemas.openxmlformats.org/drawingml/2006/main" xmlns:r="http://schemas.openxmlformats.org/officeDocument/2006/relationships" xmlns:p="http://schemas.openxmlformats.org/presentationml/2006/main">
+  <p:cSld>
+    <p:spTree>
+      <p:nvGrpSpPr>
+        <p:cNvPr id="1" name="">
+          <a:extLst>
+            <a:ext uri="{FF2B5EF4-FFF2-40B4-BE49-F238E27FC236}">
+              <a16:creationId xmlns:a16="http://schemas.microsoft.com/office/drawing/2014/main" id="{60FDDFFE-5419-41CF-44DE-98AF0FA17724}"/>
+            </a:ext>
+          </a:extLst>
+        </p:cNvPr>
+        <p:cNvGrpSpPr/>
+        <p:nvPr/>
+      </p:nvGrpSpPr>
+      <p:grpSpPr>
+        <a:xfrm>
+          <a:off x="0" y="0"/>
+          <a:ext cx="0" cy="0"/>
+          <a:chOff x="0" y="0"/>
+          <a:chExt cx="0" cy="0"/>
+        </a:xfrm>
+      </p:grpSpPr>
+      <p:sp>
+        <p:nvSpPr>
+          <p:cNvPr id="2" name="Slide Image Placeholder 1">
+            <a:extLst>
+              <a:ext uri="{FF2B5EF4-FFF2-40B4-BE49-F238E27FC236}">
+                <a16:creationId xmlns:a16="http://schemas.microsoft.com/office/drawing/2014/main" id="{6BE93C41-8C94-F26A-C1F0-ED8EFC33561C}"/>
+              </a:ext>
+            </a:extLst>
+          </p:cNvPr>
+          <p:cNvSpPr>
+            <a:spLocks noGrp="1" noRot="1" noChangeAspect="1"/>
+          </p:cNvSpPr>
+          <p:nvPr>
+            <p:ph type="sldImg"/>
+          </p:nvPr>
+        </p:nvSpPr>
+        <p:spPr/>
+        <p:txBody>
+          <a:bodyPr/>
+          <a:lstStyle/>
+          <a:p>
+            <a:endParaRPr lang="zh-CN" altLang="en-US"/>
+          </a:p>
+        </p:txBody>
+      </p:sp>
+      <p:sp>
+        <p:nvSpPr>
+          <p:cNvPr id="3" name="Notes Placeholder 2">
+            <a:extLst>
+              <a:ext uri="{FF2B5EF4-FFF2-40B4-BE49-F238E27FC236}">
+                <a16:creationId xmlns:a16="http://schemas.microsoft.com/office/drawing/2014/main" id="{7F5559AA-1BD3-E2D5-4278-38E23E9DADE2}"/>
+              </a:ext>
+            </a:extLst>
+          </p:cNvPr>
+          <p:cNvSpPr>
+            <a:spLocks noGrp="1"/>
+          </p:cNvSpPr>
+          <p:nvPr>
+            <p:ph type="body" idx="1"/>
+          </p:nvPr>
+        </p:nvSpPr>
+        <p:spPr/>
+        <p:txBody>
+          <a:bodyPr/>
+          <a:lstStyle/>
+          <a:p>
+            <a:endParaRPr lang="en-US" dirty="0"/>
+          </a:p>
+        </p:txBody>
+      </p:sp>
+      <p:sp>
+        <p:nvSpPr>
+          <p:cNvPr id="4" name="Slide Number Placeholder 3">
+            <a:extLst>
+              <a:ext uri="{FF2B5EF4-FFF2-40B4-BE49-F238E27FC236}">
+                <a16:creationId xmlns:a16="http://schemas.microsoft.com/office/drawing/2014/main" id="{4940855E-5D26-CAAA-9E12-2FACA018B6FE}"/>
+              </a:ext>
+            </a:extLst>
+          </p:cNvPr>
+          <p:cNvSpPr>
+            <a:spLocks noGrp="1"/>
+          </p:cNvSpPr>
+          <p:nvPr>
+            <p:ph type="sldNum" sz="quarter" idx="10"/>
+          </p:nvPr>
+        </p:nvSpPr>
+        <p:spPr/>
+        <p:txBody>
+          <a:bodyPr/>
+          <a:lstStyle/>
+          <a:p>
+            <a:fld id="{F7021451-1387-4CA6-816F-3879F97B5CBC}" type="slidenum">
+              <a:rPr lang="en-US"/>
+              <a:t>11</a:t>
+            </a:fld>
+            <a:endParaRPr lang="en-US"/>
+          </a:p>
+        </p:txBody>
+      </p:sp>
+    </p:spTree>
+    <p:extLst>
+      <p:ext uri="{BB962C8B-B14F-4D97-AF65-F5344CB8AC3E}">
+        <p14:creationId xmlns:p14="http://schemas.microsoft.com/office/powerpoint/2010/main" val="1319560797"/>
+      </p:ext>
+    </p:extLst>
+  </p:cSld>
+  <p:clrMapOvr>
+    <a:masterClrMapping/>
+  </p:clrMapOvr>
+</p:notes>
+</file>
+
+<file path=ppt/notesSlides/notesSlide12.xml><?xml version="1.0" encoding="utf-8"?>
+<p:notes xmlns:a="http://schemas.openxmlformats.org/drawingml/2006/main" xmlns:r="http://schemas.openxmlformats.org/officeDocument/2006/relationships" xmlns:p="http://schemas.openxmlformats.org/presentationml/2006/main">
+  <p:cSld>
+    <p:spTree>
+      <p:nvGrpSpPr>
+        <p:cNvPr id="1" name="">
+          <a:extLst>
+            <a:ext uri="{FF2B5EF4-FFF2-40B4-BE49-F238E27FC236}">
+              <a16:creationId xmlns:a16="http://schemas.microsoft.com/office/drawing/2014/main" id="{60FDDFFE-5419-41CF-44DE-98AF0FA17724}"/>
+            </a:ext>
+          </a:extLst>
+        </p:cNvPr>
+        <p:cNvGrpSpPr/>
+        <p:nvPr/>
+      </p:nvGrpSpPr>
+      <p:grpSpPr>
+        <a:xfrm>
+          <a:off x="0" y="0"/>
+          <a:ext cx="0" cy="0"/>
+          <a:chOff x="0" y="0"/>
+          <a:chExt cx="0" cy="0"/>
+        </a:xfrm>
+      </p:grpSpPr>
+      <p:sp>
+        <p:nvSpPr>
+          <p:cNvPr id="2" name="Slide Image Placeholder 1">
+            <a:extLst>
+              <a:ext uri="{FF2B5EF4-FFF2-40B4-BE49-F238E27FC236}">
+                <a16:creationId xmlns:a16="http://schemas.microsoft.com/office/drawing/2014/main" id="{6BE93C41-8C94-F26A-C1F0-ED8EFC33561C}"/>
+              </a:ext>
+            </a:extLst>
+          </p:cNvPr>
+          <p:cNvSpPr>
+            <a:spLocks noGrp="1" noRot="1" noChangeAspect="1"/>
+          </p:cNvSpPr>
+          <p:nvPr>
+            <p:ph type="sldImg"/>
+          </p:nvPr>
+        </p:nvSpPr>
+        <p:spPr/>
+        <p:txBody>
+          <a:bodyPr/>
+          <a:lstStyle/>
+          <a:p>
+            <a:endParaRPr lang="zh-CN" altLang="en-US"/>
+          </a:p>
+        </p:txBody>
+      </p:sp>
+      <p:sp>
+        <p:nvSpPr>
+          <p:cNvPr id="3" name="Notes Placeholder 2">
+            <a:extLst>
+              <a:ext uri="{FF2B5EF4-FFF2-40B4-BE49-F238E27FC236}">
+                <a16:creationId xmlns:a16="http://schemas.microsoft.com/office/drawing/2014/main" id="{7F5559AA-1BD3-E2D5-4278-38E23E9DADE2}"/>
+              </a:ext>
+            </a:extLst>
+          </p:cNvPr>
+          <p:cNvSpPr>
+            <a:spLocks noGrp="1"/>
+          </p:cNvSpPr>
+          <p:nvPr>
+            <p:ph type="body" idx="1"/>
+          </p:nvPr>
+        </p:nvSpPr>
+        <p:spPr/>
+        <p:txBody>
+          <a:bodyPr/>
+          <a:lstStyle/>
+          <a:p>
+            <a:endParaRPr lang="en-US" dirty="0"/>
+          </a:p>
+        </p:txBody>
+      </p:sp>
+      <p:sp>
+        <p:nvSpPr>
+          <p:cNvPr id="4" name="Slide Number Placeholder 3">
+            <a:extLst>
+              <a:ext uri="{FF2B5EF4-FFF2-40B4-BE49-F238E27FC236}">
+                <a16:creationId xmlns:a16="http://schemas.microsoft.com/office/drawing/2014/main" id="{4940855E-5D26-CAAA-9E12-2FACA018B6FE}"/>
+              </a:ext>
+            </a:extLst>
+          </p:cNvPr>
+          <p:cNvSpPr>
+            <a:spLocks noGrp="1"/>
+          </p:cNvSpPr>
+          <p:nvPr>
+            <p:ph type="sldNum" sz="quarter" idx="10"/>
+          </p:nvPr>
+        </p:nvSpPr>
+        <p:spPr/>
+        <p:txBody>
+          <a:bodyPr/>
+          <a:lstStyle/>
+          <a:p>
+            <a:fld id="{F7021451-1387-4CA6-816F-3879F97B5CBC}" type="slidenum">
+              <a:rPr lang="en-US"/>
+              <a:t>12</a:t>
+            </a:fld>
+            <a:endParaRPr lang="en-US"/>
+          </a:p>
+        </p:txBody>
+      </p:sp>
+    </p:spTree>
+    <p:extLst>
+      <p:ext uri="{BB962C8B-B14F-4D97-AF65-F5344CB8AC3E}">
+        <p14:creationId xmlns:p14="http://schemas.microsoft.com/office/powerpoint/2010/main" val="3715921823"/>
       </p:ext>
     </p:extLst>
   </p:cSld>
@@ -1848,6 +2196,694 @@
         </p:spPr>
       </p:pic>
     </p:spTree>
+  </p:cSld>
+  <p:clrMapOvr>
+    <a:masterClrMapping/>
+  </p:clrMapOvr>
+</p:sld>
+</file>
+
+<file path=ppt/slides/slide10.xml><?xml version="1.0" encoding="utf-8"?>
+<p:sld xmlns:a="http://schemas.openxmlformats.org/drawingml/2006/main" xmlns:r="http://schemas.openxmlformats.org/officeDocument/2006/relationships" xmlns:p="http://schemas.openxmlformats.org/presentationml/2006/main">
+  <p:cSld>
+    <p:bg>
+      <p:bgPr>
+        <a:solidFill>
+          <a:srgbClr val="0F172A"/>
+        </a:solidFill>
+        <a:effectLst/>
+      </p:bgPr>
+    </p:bg>
+    <p:spTree>
+      <p:nvGrpSpPr>
+        <p:cNvPr id="1" name="">
+          <a:extLst>
+            <a:ext uri="{FF2B5EF4-FFF2-40B4-BE49-F238E27FC236}">
+              <a16:creationId xmlns:a16="http://schemas.microsoft.com/office/drawing/2014/main" id="{6A31DC0E-893B-DCEA-D681-2A5BE715EEE0}"/>
+            </a:ext>
+          </a:extLst>
+        </p:cNvPr>
+        <p:cNvGrpSpPr/>
+        <p:nvPr/>
+      </p:nvGrpSpPr>
+      <p:grpSpPr>
+        <a:xfrm>
+          <a:off x="0" y="0"/>
+          <a:ext cx="0" cy="0"/>
+          <a:chOff x="0" y="0"/>
+          <a:chExt cx="0" cy="0"/>
+        </a:xfrm>
+      </p:grpSpPr>
+      <p:sp>
+        <p:nvSpPr>
+          <p:cNvPr id="2" name="Text 0">
+            <a:extLst>
+              <a:ext uri="{FF2B5EF4-FFF2-40B4-BE49-F238E27FC236}">
+                <a16:creationId xmlns:a16="http://schemas.microsoft.com/office/drawing/2014/main" id="{43AD94F7-C95D-2982-F982-6557270FCF0C}"/>
+              </a:ext>
+            </a:extLst>
+          </p:cNvPr>
+          <p:cNvSpPr/>
+          <p:nvPr/>
+        </p:nvSpPr>
+        <p:spPr>
+          <a:xfrm>
+            <a:off x="731520" y="457200"/>
+            <a:ext cx="7680960" cy="640080"/>
+          </a:xfrm>
+          <a:prstGeom prst="rect">
+            <a:avLst/>
+          </a:prstGeom>
+          <a:noFill/>
+          <a:ln/>
+        </p:spPr>
+        <p:txBody>
+          <a:bodyPr wrap="square" lIns="0" tIns="0" rIns="0" bIns="0" rtlCol="0" anchor="ctr"/>
+          <a:lstStyle/>
+          <a:p>
+            <a:pPr marL="0" indent="0" algn="l">
+              <a:buNone/>
+            </a:pPr>
+            <a:r>
+              <a:rPr lang="zh-CN" altLang="en-US" sz="3600" b="1" dirty="0">
+                <a:solidFill>
+                  <a:srgbClr val="F8FAFC"/>
+                </a:solidFill>
+                <a:latin typeface="Arial Black" pitchFamily="34" charset="0"/>
+                <a:ea typeface="Arial Black" pitchFamily="34" charset="-122"/>
+                <a:cs typeface="Arial Black" pitchFamily="34" charset="-120"/>
+              </a:rPr>
+              <a:t>模型架构对比</a:t>
+            </a:r>
+            <a:r>
+              <a:rPr lang="en-US" altLang="zh-CN" sz="3600" b="1" dirty="0">
+                <a:solidFill>
+                  <a:srgbClr val="F8FAFC"/>
+                </a:solidFill>
+                <a:latin typeface="Arial Black" pitchFamily="34" charset="0"/>
+                <a:ea typeface="Arial Black" pitchFamily="34" charset="-122"/>
+                <a:cs typeface="Arial Black" pitchFamily="34" charset="-120"/>
+              </a:rPr>
+              <a:t>(</a:t>
+            </a:r>
+            <a:r>
+              <a:rPr lang="zh-CN" altLang="en-US" sz="3600" b="1" dirty="0">
+                <a:solidFill>
+                  <a:srgbClr val="F8FAFC"/>
+                </a:solidFill>
+                <a:latin typeface="Arial Black" pitchFamily="34" charset="0"/>
+                <a:ea typeface="Arial Black" pitchFamily="34" charset="-122"/>
+                <a:cs typeface="Arial Black" pitchFamily="34" charset="-120"/>
+              </a:rPr>
+              <a:t>原型验证</a:t>
+            </a:r>
+            <a:r>
+              <a:rPr lang="en-US" altLang="zh-CN" sz="3600" b="1" dirty="0">
+                <a:solidFill>
+                  <a:srgbClr val="F8FAFC"/>
+                </a:solidFill>
+                <a:latin typeface="Arial Black" pitchFamily="34" charset="0"/>
+                <a:ea typeface="Arial Black" pitchFamily="34" charset="-122"/>
+                <a:cs typeface="Arial Black" pitchFamily="34" charset="-120"/>
+              </a:rPr>
+              <a:t>)</a:t>
+            </a:r>
+            <a:endParaRPr lang="en-US" sz="3600" dirty="0"/>
+          </a:p>
+        </p:txBody>
+      </p:sp>
+      <p:sp>
+        <p:nvSpPr>
+          <p:cNvPr id="3" name="Shape 1">
+            <a:extLst>
+              <a:ext uri="{FF2B5EF4-FFF2-40B4-BE49-F238E27FC236}">
+                <a16:creationId xmlns:a16="http://schemas.microsoft.com/office/drawing/2014/main" id="{CE806419-4EF0-6C69-97DC-4BED93FAA050}"/>
+              </a:ext>
+            </a:extLst>
+          </p:cNvPr>
+          <p:cNvSpPr/>
+          <p:nvPr/>
+        </p:nvSpPr>
+        <p:spPr>
+          <a:xfrm>
+            <a:off x="731520" y="1188720"/>
+            <a:ext cx="1828800" cy="0"/>
+          </a:xfrm>
+          <a:prstGeom prst="line">
+            <a:avLst/>
+          </a:prstGeom>
+          <a:noFill/>
+          <a:ln w="25400">
+            <a:solidFill>
+              <a:srgbClr val="3B82F6"/>
+            </a:solidFill>
+            <a:prstDash val="solid"/>
+          </a:ln>
+        </p:spPr>
+        <p:txBody>
+          <a:bodyPr/>
+          <a:lstStyle/>
+          <a:p>
+            <a:endParaRPr lang="zh-CN" altLang="en-US"/>
+          </a:p>
+        </p:txBody>
+      </p:sp>
+      <p:pic>
+        <p:nvPicPr>
+          <p:cNvPr id="33" name="图片 32">
+            <a:extLst>
+              <a:ext uri="{FF2B5EF4-FFF2-40B4-BE49-F238E27FC236}">
+                <a16:creationId xmlns:a16="http://schemas.microsoft.com/office/drawing/2014/main" id="{164E08A9-EB01-AB27-F57A-9E8BBC1C51D6}"/>
+              </a:ext>
+            </a:extLst>
+          </p:cNvPr>
+          <p:cNvPicPr>
+            <a:picLocks noChangeAspect="1"/>
+          </p:cNvPicPr>
+          <p:nvPr/>
+        </p:nvPicPr>
+        <p:blipFill>
+          <a:blip r:embed="rId3"/>
+          <a:stretch>
+            <a:fillRect/>
+          </a:stretch>
+        </p:blipFill>
+        <p:spPr>
+          <a:xfrm>
+            <a:off x="731520" y="1097280"/>
+            <a:ext cx="7337287" cy="4007079"/>
+          </a:xfrm>
+          <a:prstGeom prst="rect">
+            <a:avLst/>
+          </a:prstGeom>
+        </p:spPr>
+      </p:pic>
+    </p:spTree>
+    <p:extLst>
+      <p:ext uri="{BB962C8B-B14F-4D97-AF65-F5344CB8AC3E}">
+        <p14:creationId xmlns:p14="http://schemas.microsoft.com/office/powerpoint/2010/main" val="1182284173"/>
+      </p:ext>
+    </p:extLst>
+  </p:cSld>
+  <p:clrMapOvr>
+    <a:masterClrMapping/>
+  </p:clrMapOvr>
+</p:sld>
+</file>
+
+<file path=ppt/slides/slide11.xml><?xml version="1.0" encoding="utf-8"?>
+<p:sld xmlns:a="http://schemas.openxmlformats.org/drawingml/2006/main" xmlns:r="http://schemas.openxmlformats.org/officeDocument/2006/relationships" xmlns:p="http://schemas.openxmlformats.org/presentationml/2006/main">
+  <p:cSld>
+    <p:bg>
+      <p:bgPr>
+        <a:solidFill>
+          <a:srgbClr val="0F172A"/>
+        </a:solidFill>
+        <a:effectLst/>
+      </p:bgPr>
+    </p:bg>
+    <p:spTree>
+      <p:nvGrpSpPr>
+        <p:cNvPr id="1" name="">
+          <a:extLst>
+            <a:ext uri="{FF2B5EF4-FFF2-40B4-BE49-F238E27FC236}">
+              <a16:creationId xmlns:a16="http://schemas.microsoft.com/office/drawing/2014/main" id="{833444C4-BB7D-1C9A-E8C0-F808F7D17649}"/>
+            </a:ext>
+          </a:extLst>
+        </p:cNvPr>
+        <p:cNvGrpSpPr/>
+        <p:nvPr/>
+      </p:nvGrpSpPr>
+      <p:grpSpPr>
+        <a:xfrm>
+          <a:off x="0" y="0"/>
+          <a:ext cx="0" cy="0"/>
+          <a:chOff x="0" y="0"/>
+          <a:chExt cx="0" cy="0"/>
+        </a:xfrm>
+      </p:grpSpPr>
+      <p:sp>
+        <p:nvSpPr>
+          <p:cNvPr id="2" name="Text 0">
+            <a:extLst>
+              <a:ext uri="{FF2B5EF4-FFF2-40B4-BE49-F238E27FC236}">
+                <a16:creationId xmlns:a16="http://schemas.microsoft.com/office/drawing/2014/main" id="{488187B8-4134-F374-3DB2-C723D244E326}"/>
+              </a:ext>
+            </a:extLst>
+          </p:cNvPr>
+          <p:cNvSpPr/>
+          <p:nvPr/>
+        </p:nvSpPr>
+        <p:spPr>
+          <a:xfrm>
+            <a:off x="731520" y="457200"/>
+            <a:ext cx="7680960" cy="640080"/>
+          </a:xfrm>
+          <a:prstGeom prst="rect">
+            <a:avLst/>
+          </a:prstGeom>
+          <a:noFill/>
+          <a:ln/>
+        </p:spPr>
+        <p:txBody>
+          <a:bodyPr wrap="square" lIns="0" tIns="0" rIns="0" bIns="0" rtlCol="0" anchor="ctr"/>
+          <a:lstStyle/>
+          <a:p>
+            <a:pPr marL="0" indent="0" algn="l">
+              <a:buNone/>
+            </a:pPr>
+            <a:r>
+              <a:rPr lang="zh-CN" altLang="en-US" sz="3600" b="1" dirty="0">
+                <a:solidFill>
+                  <a:srgbClr val="F8FAFC"/>
+                </a:solidFill>
+                <a:latin typeface="Arial Black" pitchFamily="34" charset="0"/>
+                <a:ea typeface="Arial Black" pitchFamily="34" charset="-122"/>
+                <a:cs typeface="Arial Black" pitchFamily="34" charset="-120"/>
+              </a:rPr>
+              <a:t>两个点</a:t>
+            </a:r>
+            <a:r>
+              <a:rPr lang="zh-CN" altLang="en-US" sz="3600" b="1">
+                <a:solidFill>
+                  <a:srgbClr val="F8FAFC"/>
+                </a:solidFill>
+                <a:latin typeface="Arial Black" pitchFamily="34" charset="0"/>
+                <a:ea typeface="Arial Black" pitchFamily="34" charset="-122"/>
+                <a:cs typeface="Arial Black" pitchFamily="34" charset="-120"/>
+              </a:rPr>
+              <a:t>之间运动任务</a:t>
+            </a:r>
+            <a:r>
+              <a:rPr lang="en-US" altLang="zh-CN" sz="3600" b="1">
+                <a:solidFill>
+                  <a:srgbClr val="F8FAFC"/>
+                </a:solidFill>
+                <a:latin typeface="Arial Black" pitchFamily="34" charset="0"/>
+                <a:ea typeface="Arial Black" pitchFamily="34" charset="-122"/>
+                <a:cs typeface="Arial Black" pitchFamily="34" charset="-120"/>
+              </a:rPr>
+              <a:t>(</a:t>
+            </a:r>
+            <a:r>
+              <a:rPr lang="zh-CN" altLang="en-US" sz="3600" b="1" dirty="0">
+                <a:solidFill>
+                  <a:srgbClr val="F8FAFC"/>
+                </a:solidFill>
+                <a:latin typeface="Arial Black" pitchFamily="34" charset="0"/>
+                <a:ea typeface="Arial Black" pitchFamily="34" charset="-122"/>
+                <a:cs typeface="Arial Black" pitchFamily="34" charset="-120"/>
+              </a:rPr>
+              <a:t>原型验证</a:t>
+            </a:r>
+            <a:r>
+              <a:rPr lang="en-US" altLang="zh-CN" sz="3600" b="1" dirty="0">
+                <a:solidFill>
+                  <a:srgbClr val="F8FAFC"/>
+                </a:solidFill>
+                <a:latin typeface="Arial Black" pitchFamily="34" charset="0"/>
+                <a:ea typeface="Arial Black" pitchFamily="34" charset="-122"/>
+                <a:cs typeface="Arial Black" pitchFamily="34" charset="-120"/>
+              </a:rPr>
+              <a:t>)</a:t>
+            </a:r>
+            <a:endParaRPr lang="en-US" sz="3600" dirty="0"/>
+          </a:p>
+        </p:txBody>
+      </p:sp>
+      <p:sp>
+        <p:nvSpPr>
+          <p:cNvPr id="3" name="Shape 1">
+            <a:extLst>
+              <a:ext uri="{FF2B5EF4-FFF2-40B4-BE49-F238E27FC236}">
+                <a16:creationId xmlns:a16="http://schemas.microsoft.com/office/drawing/2014/main" id="{C0B21872-3813-77A6-288D-CB6560C085FA}"/>
+              </a:ext>
+            </a:extLst>
+          </p:cNvPr>
+          <p:cNvSpPr/>
+          <p:nvPr/>
+        </p:nvSpPr>
+        <p:spPr>
+          <a:xfrm>
+            <a:off x="731520" y="1188720"/>
+            <a:ext cx="1828800" cy="0"/>
+          </a:xfrm>
+          <a:prstGeom prst="line">
+            <a:avLst/>
+          </a:prstGeom>
+          <a:noFill/>
+          <a:ln w="25400">
+            <a:solidFill>
+              <a:srgbClr val="3B82F6"/>
+            </a:solidFill>
+            <a:prstDash val="solid"/>
+          </a:ln>
+        </p:spPr>
+        <p:txBody>
+          <a:bodyPr/>
+          <a:lstStyle/>
+          <a:p>
+            <a:endParaRPr lang="zh-CN" altLang="en-US"/>
+          </a:p>
+        </p:txBody>
+      </p:sp>
+      <p:pic>
+        <p:nvPicPr>
+          <p:cNvPr id="4" name="两个点轨迹">
+            <a:hlinkClick r:id="" action="ppaction://media"/>
+            <a:extLst>
+              <a:ext uri="{FF2B5EF4-FFF2-40B4-BE49-F238E27FC236}">
+                <a16:creationId xmlns:a16="http://schemas.microsoft.com/office/drawing/2014/main" id="{1744E69E-0E20-211C-F271-0D7F08F49255}"/>
+              </a:ext>
+            </a:extLst>
+          </p:cNvPr>
+          <p:cNvPicPr>
+            <a:picLocks noChangeAspect="1"/>
+          </p:cNvPicPr>
+          <p:nvPr>
+            <a:videoFile r:link="rId2"/>
+            <p:extLst>
+              <p:ext uri="{DAA4B4D4-6D71-4841-9C94-3DE7FCFB9230}">
+                <p14:media xmlns:p14="http://schemas.microsoft.com/office/powerpoint/2010/main" r:embed="rId1"/>
+              </p:ext>
+            </p:extLst>
+          </p:nvPr>
+        </p:nvPicPr>
+        <p:blipFill>
+          <a:blip r:embed="rId5"/>
+          <a:stretch>
+            <a:fillRect/>
+          </a:stretch>
+        </p:blipFill>
+        <p:spPr>
+          <a:xfrm>
+            <a:off x="0" y="1280161"/>
+            <a:ext cx="9144000" cy="3048000"/>
+          </a:xfrm>
+          <a:prstGeom prst="rect">
+            <a:avLst/>
+          </a:prstGeom>
+        </p:spPr>
+      </p:pic>
+    </p:spTree>
+    <p:extLst>
+      <p:ext uri="{BB962C8B-B14F-4D97-AF65-F5344CB8AC3E}">
+        <p14:creationId xmlns:p14="http://schemas.microsoft.com/office/powerpoint/2010/main" val="4215196535"/>
+      </p:ext>
+    </p:extLst>
+  </p:cSld>
+  <p:clrMapOvr>
+    <a:masterClrMapping/>
+  </p:clrMapOvr>
+  <p:timing>
+    <p:tnLst>
+      <p:par>
+        <p:cTn id="1" dur="indefinite" restart="never" nodeType="tmRoot">
+          <p:childTnLst>
+            <p:seq concurrent="1" nextAc="seek">
+              <p:cTn id="2" dur="indefinite" nodeType="mainSeq">
+                <p:childTnLst>
+                  <p:par>
+                    <p:cTn id="3" fill="hold">
+                      <p:stCondLst>
+                        <p:cond delay="indefinite"/>
+                      </p:stCondLst>
+                      <p:childTnLst>
+                        <p:par>
+                          <p:cTn id="4" fill="hold">
+                            <p:stCondLst>
+                              <p:cond delay="0"/>
+                            </p:stCondLst>
+                            <p:childTnLst>
+                              <p:par>
+                                <p:cTn id="5" presetID="1" presetClass="mediacall" presetSubtype="0" fill="hold" nodeType="clickEffect">
+                                  <p:stCondLst>
+                                    <p:cond delay="0"/>
+                                  </p:stCondLst>
+                                  <p:childTnLst>
+                                    <p:cmd type="call" cmd="playFrom(0.0)">
+                                      <p:cBhvr>
+                                        <p:cTn id="6" dur="5917" fill="hold"/>
+                                        <p:tgtEl>
+                                          <p:spTgt spid="4"/>
+                                        </p:tgtEl>
+                                      </p:cBhvr>
+                                    </p:cmd>
+                                  </p:childTnLst>
+                                </p:cTn>
+                              </p:par>
+                            </p:childTnLst>
+                          </p:cTn>
+                        </p:par>
+                      </p:childTnLst>
+                    </p:cTn>
+                  </p:par>
+                </p:childTnLst>
+              </p:cTn>
+              <p:prevCondLst>
+                <p:cond evt="onPrev" delay="0">
+                  <p:tgtEl>
+                    <p:sldTgt/>
+                  </p:tgtEl>
+                </p:cond>
+              </p:prevCondLst>
+              <p:nextCondLst>
+                <p:cond evt="onNext" delay="0">
+                  <p:tgtEl>
+                    <p:sldTgt/>
+                  </p:tgtEl>
+                </p:cond>
+              </p:nextCondLst>
+            </p:seq>
+            <p:video>
+              <p:cMediaNode vol="80000">
+                <p:cTn id="7" fill="hold" display="0">
+                  <p:stCondLst>
+                    <p:cond delay="indefinite"/>
+                  </p:stCondLst>
+                </p:cTn>
+                <p:tgtEl>
+                  <p:spTgt spid="4"/>
+                </p:tgtEl>
+              </p:cMediaNode>
+            </p:video>
+            <p:seq concurrent="1" nextAc="seek">
+              <p:cTn id="8" restart="whenNotActive" fill="hold" evtFilter="cancelBubble" nodeType="interactiveSeq">
+                <p:stCondLst>
+                  <p:cond evt="onClick" delay="0">
+                    <p:tgtEl>
+                      <p:spTgt spid="4"/>
+                    </p:tgtEl>
+                  </p:cond>
+                </p:stCondLst>
+                <p:endSync evt="end" delay="0">
+                  <p:rtn val="all"/>
+                </p:endSync>
+                <p:childTnLst>
+                  <p:par>
+                    <p:cTn id="9" fill="hold">
+                      <p:stCondLst>
+                        <p:cond delay="0"/>
+                      </p:stCondLst>
+                      <p:childTnLst>
+                        <p:par>
+                          <p:cTn id="10" fill="hold">
+                            <p:stCondLst>
+                              <p:cond delay="0"/>
+                            </p:stCondLst>
+                            <p:childTnLst>
+                              <p:par>
+                                <p:cTn id="11" presetID="2" presetClass="mediacall" presetSubtype="0" fill="hold" nodeType="clickEffect">
+                                  <p:stCondLst>
+                                    <p:cond delay="0"/>
+                                  </p:stCondLst>
+                                  <p:childTnLst>
+                                    <p:cmd type="call" cmd="togglePause">
+                                      <p:cBhvr>
+                                        <p:cTn id="12" dur="1" fill="hold"/>
+                                        <p:tgtEl>
+                                          <p:spTgt spid="4"/>
+                                        </p:tgtEl>
+                                      </p:cBhvr>
+                                    </p:cmd>
+                                  </p:childTnLst>
+                                </p:cTn>
+                              </p:par>
+                            </p:childTnLst>
+                          </p:cTn>
+                        </p:par>
+                      </p:childTnLst>
+                    </p:cTn>
+                  </p:par>
+                </p:childTnLst>
+              </p:cTn>
+              <p:nextCondLst>
+                <p:cond evt="onClick" delay="0">
+                  <p:tgtEl>
+                    <p:spTgt spid="4"/>
+                  </p:tgtEl>
+                </p:cond>
+              </p:nextCondLst>
+            </p:seq>
+          </p:childTnLst>
+        </p:cTn>
+      </p:par>
+    </p:tnLst>
+  </p:timing>
+</p:sld>
+</file>
+
+<file path=ppt/slides/slide12.xml><?xml version="1.0" encoding="utf-8"?>
+<p:sld xmlns:a="http://schemas.openxmlformats.org/drawingml/2006/main" xmlns:r="http://schemas.openxmlformats.org/officeDocument/2006/relationships" xmlns:p="http://schemas.openxmlformats.org/presentationml/2006/main">
+  <p:cSld>
+    <p:bg>
+      <p:bgPr>
+        <a:solidFill>
+          <a:srgbClr val="0F172A"/>
+        </a:solidFill>
+        <a:effectLst/>
+      </p:bgPr>
+    </p:bg>
+    <p:spTree>
+      <p:nvGrpSpPr>
+        <p:cNvPr id="1" name="">
+          <a:extLst>
+            <a:ext uri="{FF2B5EF4-FFF2-40B4-BE49-F238E27FC236}">
+              <a16:creationId xmlns:a16="http://schemas.microsoft.com/office/drawing/2014/main" id="{833444C4-BB7D-1C9A-E8C0-F808F7D17649}"/>
+            </a:ext>
+          </a:extLst>
+        </p:cNvPr>
+        <p:cNvGrpSpPr/>
+        <p:nvPr/>
+      </p:nvGrpSpPr>
+      <p:grpSpPr>
+        <a:xfrm>
+          <a:off x="0" y="0"/>
+          <a:ext cx="0" cy="0"/>
+          <a:chOff x="0" y="0"/>
+          <a:chExt cx="0" cy="0"/>
+        </a:xfrm>
+      </p:grpSpPr>
+      <p:sp>
+        <p:nvSpPr>
+          <p:cNvPr id="2" name="Text 0">
+            <a:extLst>
+              <a:ext uri="{FF2B5EF4-FFF2-40B4-BE49-F238E27FC236}">
+                <a16:creationId xmlns:a16="http://schemas.microsoft.com/office/drawing/2014/main" id="{488187B8-4134-F374-3DB2-C723D244E326}"/>
+              </a:ext>
+            </a:extLst>
+          </p:cNvPr>
+          <p:cNvSpPr/>
+          <p:nvPr/>
+        </p:nvSpPr>
+        <p:spPr>
+          <a:xfrm>
+            <a:off x="731520" y="457200"/>
+            <a:ext cx="7680960" cy="640080"/>
+          </a:xfrm>
+          <a:prstGeom prst="rect">
+            <a:avLst/>
+          </a:prstGeom>
+          <a:noFill/>
+          <a:ln/>
+        </p:spPr>
+        <p:txBody>
+          <a:bodyPr wrap="square" lIns="0" tIns="0" rIns="0" bIns="0" rtlCol="0" anchor="ctr"/>
+          <a:lstStyle/>
+          <a:p>
+            <a:pPr marL="0" indent="0" algn="l">
+              <a:buNone/>
+            </a:pPr>
+            <a:r>
+              <a:rPr lang="zh-CN" altLang="en-US" sz="3600" b="1" dirty="0">
+                <a:solidFill>
+                  <a:srgbClr val="F8FAFC"/>
+                </a:solidFill>
+                <a:latin typeface="Arial Black" pitchFamily="34" charset="0"/>
+                <a:ea typeface="Arial Black" pitchFamily="34" charset="-122"/>
+                <a:cs typeface="Arial Black" pitchFamily="34" charset="-120"/>
+              </a:rPr>
+              <a:t>开门任务</a:t>
+            </a:r>
+            <a:r>
+              <a:rPr lang="en-US" altLang="zh-CN" sz="3600" b="1" dirty="0">
+                <a:solidFill>
+                  <a:srgbClr val="F8FAFC"/>
+                </a:solidFill>
+                <a:latin typeface="Arial Black" pitchFamily="34" charset="0"/>
+                <a:ea typeface="Arial Black" pitchFamily="34" charset="-122"/>
+                <a:cs typeface="Arial Black" pitchFamily="34" charset="-120"/>
+              </a:rPr>
+              <a:t>(</a:t>
+            </a:r>
+            <a:r>
+              <a:rPr lang="zh-CN" altLang="en-US" sz="3600" b="1" dirty="0">
+                <a:solidFill>
+                  <a:srgbClr val="F8FAFC"/>
+                </a:solidFill>
+                <a:latin typeface="Arial Black" pitchFamily="34" charset="0"/>
+                <a:ea typeface="Arial Black" pitchFamily="34" charset="-122"/>
+                <a:cs typeface="Arial Black" pitchFamily="34" charset="-120"/>
+              </a:rPr>
+              <a:t>原型验证</a:t>
+            </a:r>
+            <a:r>
+              <a:rPr lang="en-US" altLang="zh-CN" sz="3600" b="1" dirty="0">
+                <a:solidFill>
+                  <a:srgbClr val="F8FAFC"/>
+                </a:solidFill>
+                <a:latin typeface="Arial Black" pitchFamily="34" charset="0"/>
+                <a:ea typeface="Arial Black" pitchFamily="34" charset="-122"/>
+                <a:cs typeface="Arial Black" pitchFamily="34" charset="-120"/>
+              </a:rPr>
+              <a:t>)</a:t>
+            </a:r>
+            <a:endParaRPr lang="en-US" sz="3600" dirty="0"/>
+          </a:p>
+        </p:txBody>
+      </p:sp>
+      <p:sp>
+        <p:nvSpPr>
+          <p:cNvPr id="3" name="Shape 1">
+            <a:extLst>
+              <a:ext uri="{FF2B5EF4-FFF2-40B4-BE49-F238E27FC236}">
+                <a16:creationId xmlns:a16="http://schemas.microsoft.com/office/drawing/2014/main" id="{C0B21872-3813-77A6-288D-CB6560C085FA}"/>
+              </a:ext>
+            </a:extLst>
+          </p:cNvPr>
+          <p:cNvSpPr/>
+          <p:nvPr/>
+        </p:nvSpPr>
+        <p:spPr>
+          <a:xfrm>
+            <a:off x="731520" y="1188720"/>
+            <a:ext cx="1828800" cy="0"/>
+          </a:xfrm>
+          <a:prstGeom prst="line">
+            <a:avLst/>
+          </a:prstGeom>
+          <a:noFill/>
+          <a:ln w="25400">
+            <a:solidFill>
+              <a:srgbClr val="3B82F6"/>
+            </a:solidFill>
+            <a:prstDash val="solid"/>
+          </a:ln>
+        </p:spPr>
+        <p:txBody>
+          <a:bodyPr/>
+          <a:lstStyle/>
+          <a:p>
+            <a:endParaRPr lang="zh-CN" altLang="en-US"/>
+          </a:p>
+        </p:txBody>
+      </p:sp>
+    </p:spTree>
+    <p:extLst>
+      <p:ext uri="{BB962C8B-B14F-4D97-AF65-F5344CB8AC3E}">
+        <p14:creationId xmlns:p14="http://schemas.microsoft.com/office/powerpoint/2010/main" val="3510943320"/>
+      </p:ext>
+    </p:extLst>
   </p:cSld>
   <p:clrMapOvr>
     <a:masterClrMapping/>
